--- a/PresentationsEpreuves/Presentations_Epreuves.pptx
+++ b/PresentationsEpreuves/Presentations_Epreuves.pptx
@@ -30503,7 +30503,7 @@
           <a:p>
             <a:fld id="{3B93ECCE-5391-441B-9FF0-3A0DC0698398}" type="datetimeFigureOut">
               <a:rPr lang="fr-FR" smtClean="0"/>
-              <a:t>09/05/2025</a:t>
+              <a:t>04/05/2026</a:t>
             </a:fld>
             <a:endParaRPr lang="fr-FR"/>
           </a:p>
@@ -30673,7 +30673,7 @@
           <a:p>
             <a:fld id="{3B93ECCE-5391-441B-9FF0-3A0DC0698398}" type="datetimeFigureOut">
               <a:rPr lang="fr-FR" smtClean="0"/>
-              <a:t>09/05/2025</a:t>
+              <a:t>04/05/2026</a:t>
             </a:fld>
             <a:endParaRPr lang="fr-FR"/>
           </a:p>
@@ -30853,7 +30853,7 @@
           <a:p>
             <a:fld id="{3B93ECCE-5391-441B-9FF0-3A0DC0698398}" type="datetimeFigureOut">
               <a:rPr lang="fr-FR" smtClean="0"/>
-              <a:t>09/05/2025</a:t>
+              <a:t>04/05/2026</a:t>
             </a:fld>
             <a:endParaRPr lang="fr-FR"/>
           </a:p>
@@ -31023,7 +31023,7 @@
           <a:p>
             <a:fld id="{3B93ECCE-5391-441B-9FF0-3A0DC0698398}" type="datetimeFigureOut">
               <a:rPr lang="fr-FR" smtClean="0"/>
-              <a:t>09/05/2025</a:t>
+              <a:t>04/05/2026</a:t>
             </a:fld>
             <a:endParaRPr lang="fr-FR"/>
           </a:p>
@@ -31267,7 +31267,7 @@
           <a:p>
             <a:fld id="{3B93ECCE-5391-441B-9FF0-3A0DC0698398}" type="datetimeFigureOut">
               <a:rPr lang="fr-FR" smtClean="0"/>
-              <a:t>09/05/2025</a:t>
+              <a:t>04/05/2026</a:t>
             </a:fld>
             <a:endParaRPr lang="fr-FR"/>
           </a:p>
@@ -31499,7 +31499,7 @@
           <a:p>
             <a:fld id="{3B93ECCE-5391-441B-9FF0-3A0DC0698398}" type="datetimeFigureOut">
               <a:rPr lang="fr-FR" smtClean="0"/>
-              <a:t>09/05/2025</a:t>
+              <a:t>04/05/2026</a:t>
             </a:fld>
             <a:endParaRPr lang="fr-FR"/>
           </a:p>
@@ -31866,7 +31866,7 @@
           <a:p>
             <a:fld id="{3B93ECCE-5391-441B-9FF0-3A0DC0698398}" type="datetimeFigureOut">
               <a:rPr lang="fr-FR" smtClean="0"/>
-              <a:t>09/05/2025</a:t>
+              <a:t>04/05/2026</a:t>
             </a:fld>
             <a:endParaRPr lang="fr-FR"/>
           </a:p>
@@ -31984,7 +31984,7 @@
           <a:p>
             <a:fld id="{3B93ECCE-5391-441B-9FF0-3A0DC0698398}" type="datetimeFigureOut">
               <a:rPr lang="fr-FR" smtClean="0"/>
-              <a:t>09/05/2025</a:t>
+              <a:t>04/05/2026</a:t>
             </a:fld>
             <a:endParaRPr lang="fr-FR"/>
           </a:p>
@@ -32079,7 +32079,7 @@
           <a:p>
             <a:fld id="{3B93ECCE-5391-441B-9FF0-3A0DC0698398}" type="datetimeFigureOut">
               <a:rPr lang="fr-FR" smtClean="0"/>
-              <a:t>09/05/2025</a:t>
+              <a:t>04/05/2026</a:t>
             </a:fld>
             <a:endParaRPr lang="fr-FR"/>
           </a:p>
@@ -32356,7 +32356,7 @@
           <a:p>
             <a:fld id="{3B93ECCE-5391-441B-9FF0-3A0DC0698398}" type="datetimeFigureOut">
               <a:rPr lang="fr-FR" smtClean="0"/>
-              <a:t>09/05/2025</a:t>
+              <a:t>04/05/2026</a:t>
             </a:fld>
             <a:endParaRPr lang="fr-FR"/>
           </a:p>
@@ -32613,7 +32613,7 @@
           <a:p>
             <a:fld id="{3B93ECCE-5391-441B-9FF0-3A0DC0698398}" type="datetimeFigureOut">
               <a:rPr lang="fr-FR" smtClean="0"/>
-              <a:t>09/05/2025</a:t>
+              <a:t>04/05/2026</a:t>
             </a:fld>
             <a:endParaRPr lang="fr-FR"/>
           </a:p>
@@ -32826,7 +32826,7 @@
           <a:p>
             <a:fld id="{3B93ECCE-5391-441B-9FF0-3A0DC0698398}" type="datetimeFigureOut">
               <a:rPr lang="fr-FR" smtClean="0"/>
-              <a:t>09/05/2025</a:t>
+              <a:t>04/05/2026</a:t>
             </a:fld>
             <a:endParaRPr lang="fr-FR"/>
           </a:p>
@@ -51384,7 +51384,7 @@
             </a:r>
           </a:p>
           <a:p>
-            <a:pPr marL="285750" indent="-285750">
+            <a:pPr marL="285750" indent="-285750" algn="just">
               <a:buClr>
                 <a:schemeClr val="accent1"/>
               </a:buClr>
@@ -51467,7 +51467,7 @@
               <a:rPr lang="fr-FR" sz="1100" dirty="0">
                 <a:latin typeface="Arial Nova" panose="020B0504020202020204" pitchFamily="34" charset="0"/>
               </a:rPr>
-              <a:t>Savoir passer d’un tableau de valeurs à une courbe</a:t>
+              <a:t>Savoir passer d’un tableau de valeurs à une courbe.</a:t>
             </a:r>
           </a:p>
         </p:txBody>
@@ -51511,7 +51511,7 @@
               <a:rPr lang="fr-FR" sz="1100" dirty="0">
                 <a:latin typeface="Arial Nova" panose="020B0504020202020204" pitchFamily="34" charset="0"/>
               </a:rPr>
-              <a:t>Maîtriser les constituants de la chaîne de puissance ( = chaine d’énergie, = chaine fonctionnelle)</a:t>
+              <a:t>Maîtriser les constituants de la chaîne de puissance ( = chaine d’énergie, = chaine fonctionnelle).</a:t>
             </a:r>
           </a:p>
           <a:p>
@@ -51533,7 +51533,7 @@
                 <a:latin typeface="Arial Nova" panose="020B0504020202020204" pitchFamily="34" charset="0"/>
                 <a:sym typeface="Wingdings" panose="05000000000000000000" pitchFamily="2" charset="2"/>
               </a:rPr>
-              <a:t></a:t>
+              <a:t>.</a:t>
             </a:r>
           </a:p>
           <a:p>
